--- a/slides/0_intro.pptx
+++ b/slides/0_intro.pptx
@@ -248,7 +248,7 @@
           <a:p>
             <a:fld id="{30DB1DD2-73B1-F14C-85CF-6D78FFDE7F84}" type="datetimeFigureOut">
               <a:rPr lang="ru-RU" smtClean="0"/>
-              <a:t>06.09.2026</a:t>
+              <a:t>07.09.2026</a:t>
             </a:fld>
             <a:endParaRPr lang="ru-RU"/>
           </a:p>
@@ -1166,7 +1166,7 @@
           <a:p>
             <a:fld id="{DBAE4A8F-D894-394B-8106-7DD72FD6EB1F}" type="datetimeFigureOut">
               <a:rPr lang="ru-RU" smtClean="0"/>
-              <a:t>06.09.2026</a:t>
+              <a:t>07.09.2026</a:t>
             </a:fld>
             <a:endParaRPr lang="ru-RU"/>
           </a:p>
@@ -1364,7 +1364,7 @@
           <a:p>
             <a:fld id="{DBAE4A8F-D894-394B-8106-7DD72FD6EB1F}" type="datetimeFigureOut">
               <a:rPr lang="ru-RU" smtClean="0"/>
-              <a:t>06.09.2026</a:t>
+              <a:t>07.09.2026</a:t>
             </a:fld>
             <a:endParaRPr lang="ru-RU"/>
           </a:p>
@@ -1572,7 +1572,7 @@
           <a:p>
             <a:fld id="{DBAE4A8F-D894-394B-8106-7DD72FD6EB1F}" type="datetimeFigureOut">
               <a:rPr lang="ru-RU" smtClean="0"/>
-              <a:t>06.09.2026</a:t>
+              <a:t>07.09.2026</a:t>
             </a:fld>
             <a:endParaRPr lang="ru-RU"/>
           </a:p>
@@ -1770,7 +1770,7 @@
           <a:p>
             <a:fld id="{DBAE4A8F-D894-394B-8106-7DD72FD6EB1F}" type="datetimeFigureOut">
               <a:rPr lang="ru-RU" smtClean="0"/>
-              <a:t>06.09.2026</a:t>
+              <a:t>07.09.2026</a:t>
             </a:fld>
             <a:endParaRPr lang="ru-RU"/>
           </a:p>
@@ -2045,7 +2045,7 @@
           <a:p>
             <a:fld id="{DBAE4A8F-D894-394B-8106-7DD72FD6EB1F}" type="datetimeFigureOut">
               <a:rPr lang="ru-RU" smtClean="0"/>
-              <a:t>06.09.2026</a:t>
+              <a:t>07.09.2026</a:t>
             </a:fld>
             <a:endParaRPr lang="ru-RU"/>
           </a:p>
@@ -2310,7 +2310,7 @@
           <a:p>
             <a:fld id="{DBAE4A8F-D894-394B-8106-7DD72FD6EB1F}" type="datetimeFigureOut">
               <a:rPr lang="ru-RU" smtClean="0"/>
-              <a:t>06.09.2026</a:t>
+              <a:t>07.09.2026</a:t>
             </a:fld>
             <a:endParaRPr lang="ru-RU"/>
           </a:p>
@@ -2722,7 +2722,7 @@
           <a:p>
             <a:fld id="{DBAE4A8F-D894-394B-8106-7DD72FD6EB1F}" type="datetimeFigureOut">
               <a:rPr lang="ru-RU" smtClean="0"/>
-              <a:t>06.09.2026</a:t>
+              <a:t>07.09.2026</a:t>
             </a:fld>
             <a:endParaRPr lang="ru-RU"/>
           </a:p>
@@ -2863,7 +2863,7 @@
           <a:p>
             <a:fld id="{DBAE4A8F-D894-394B-8106-7DD72FD6EB1F}" type="datetimeFigureOut">
               <a:rPr lang="ru-RU" smtClean="0"/>
-              <a:t>06.09.2026</a:t>
+              <a:t>07.09.2026</a:t>
             </a:fld>
             <a:endParaRPr lang="ru-RU"/>
           </a:p>
@@ -2976,7 +2976,7 @@
           <a:p>
             <a:fld id="{DBAE4A8F-D894-394B-8106-7DD72FD6EB1F}" type="datetimeFigureOut">
               <a:rPr lang="ru-RU" smtClean="0"/>
-              <a:t>06.09.2026</a:t>
+              <a:t>07.09.2026</a:t>
             </a:fld>
             <a:endParaRPr lang="ru-RU"/>
           </a:p>
@@ -3287,7 +3287,7 @@
           <a:p>
             <a:fld id="{DBAE4A8F-D894-394B-8106-7DD72FD6EB1F}" type="datetimeFigureOut">
               <a:rPr lang="ru-RU" smtClean="0"/>
-              <a:t>06.09.2026</a:t>
+              <a:t>07.09.2026</a:t>
             </a:fld>
             <a:endParaRPr lang="ru-RU"/>
           </a:p>
@@ -3575,7 +3575,7 @@
           <a:p>
             <a:fld id="{DBAE4A8F-D894-394B-8106-7DD72FD6EB1F}" type="datetimeFigureOut">
               <a:rPr lang="ru-RU" smtClean="0"/>
-              <a:t>06.09.2026</a:t>
+              <a:t>07.09.2026</a:t>
             </a:fld>
             <a:endParaRPr lang="ru-RU"/>
           </a:p>
@@ -3816,7 +3816,7 @@
           <a:p>
             <a:fld id="{DBAE4A8F-D894-394B-8106-7DD72FD6EB1F}" type="datetimeFigureOut">
               <a:rPr lang="ru-RU" smtClean="0"/>
-              <a:t>06.09.2026</a:t>
+              <a:t>07.09.2026</a:t>
             </a:fld>
             <a:endParaRPr lang="ru-RU"/>
           </a:p>
@@ -5031,8 +5031,8 @@
         </p:blipFill>
         <p:spPr>
           <a:xfrm>
-            <a:off x="7840491" y="1301038"/>
-            <a:ext cx="3480918" cy="4646236"/>
+            <a:off x="7840491" y="1883697"/>
+            <a:ext cx="3480918" cy="3480918"/>
           </a:xfrm>
           <a:prstGeom prst="rect">
             <a:avLst/>
@@ -8777,7 +8777,7 @@
                             </p:stCondLst>
                             <p:childTnLst>
                               <p:par>
-                                <p:cTn id="20" presetID="10" presetClass="entr" presetSubtype="0" fill="hold" nodeType="clickEffect">
+                                <p:cTn id="20" presetID="10" presetClass="entr" presetSubtype="0" fill="hold" grpId="0" nodeType="clickEffect">
                                   <p:stCondLst>
                                     <p:cond delay="0"/>
                                   </p:stCondLst>
@@ -8790,11 +8790,7 @@
                                           </p:stCondLst>
                                         </p:cTn>
                                         <p:tgtEl>
-                                          <p:spTgt spid="9">
-                                            <p:txEl>
-                                              <p:pRg st="0" end="0"/>
-                                            </p:txEl>
-                                          </p:spTgt>
+                                          <p:spTgt spid="9"/>
                                         </p:tgtEl>
                                         <p:attrNameLst>
                                           <p:attrName>style.visibility</p:attrName>
@@ -8808,11 +8804,7 @@
                                       <p:cBhvr>
                                         <p:cTn id="22" dur="500"/>
                                         <p:tgtEl>
-                                          <p:spTgt spid="9">
-                                            <p:txEl>
-                                              <p:pRg st="0" end="0"/>
-                                            </p:txEl>
-                                          </p:spTgt>
+                                          <p:spTgt spid="9"/>
                                         </p:tgtEl>
                                       </p:cBhvr>
                                     </p:animEffect>
@@ -8850,6 +8842,7 @@
       <p:bldP spid="4" grpId="0"/>
       <p:bldP spid="5" grpId="0"/>
       <p:bldP spid="6" grpId="0"/>
+      <p:bldP spid="9" grpId="0"/>
     </p:bldLst>
   </p:timing>
 </p:sld>
@@ -9273,7 +9266,7 @@
               </a:spcBef>
             </a:pPr>
             <a:r>
-              <a:rPr lang="en-US" sz="2000" dirty="0" err="1">
+              <a:rPr lang="en-US" sz="2000" dirty="0">
                 <a:solidFill>
                   <a:srgbClr val="434343"/>
                 </a:solidFill>
@@ -9281,10 +9274,28 @@
                 <a:ea typeface="Calibri" panose="020F0502020204030204" pitchFamily="34" charset="0"/>
                 <a:cs typeface="ALS Sector Regular" pitchFamily="2" charset="0"/>
               </a:rPr>
-              <a:t>Jupyter</a:t>
-            </a:r>
-            <a:r>
-              <a:rPr lang="en-US" sz="2000" dirty="0">
+              <a:t>Git</a:t>
+            </a:r>
+            <a:endParaRPr lang="ru-RU" sz="2000" dirty="0">
+              <a:solidFill>
+                <a:srgbClr val="434343"/>
+              </a:solidFill>
+              <a:latin typeface="ALS Sector Regular" pitchFamily="2" charset="0"/>
+              <a:ea typeface="Calibri" panose="020F0502020204030204" pitchFamily="34" charset="0"/>
+              <a:cs typeface="ALS Sector Regular" pitchFamily="2" charset="0"/>
+            </a:endParaRPr>
+          </a:p>
+          <a:p>
+            <a:pPr>
+              <a:lnSpc>
+                <a:spcPct val="110000"/>
+              </a:lnSpc>
+              <a:spcBef>
+                <a:spcPts val="200"/>
+              </a:spcBef>
+            </a:pPr>
+            <a:r>
+              <a:rPr lang="en-US" sz="2000" dirty="0" err="1">
                 <a:solidFill>
                   <a:srgbClr val="434343"/>
                 </a:solidFill>
@@ -9292,28 +9303,7 @@
                 <a:ea typeface="Calibri" panose="020F0502020204030204" pitchFamily="34" charset="0"/>
                 <a:cs typeface="ALS Sector Regular" pitchFamily="2" charset="0"/>
               </a:rPr>
-              <a:t> Notebook</a:t>
-            </a:r>
-          </a:p>
-          <a:p>
-            <a:pPr>
-              <a:lnSpc>
-                <a:spcPct val="110000"/>
-              </a:lnSpc>
-              <a:spcBef>
-                <a:spcPts val="200"/>
-              </a:spcBef>
-            </a:pPr>
-            <a:r>
-              <a:rPr lang="en-US" sz="2000" dirty="0" err="1">
-                <a:solidFill>
-                  <a:srgbClr val="434343"/>
-                </a:solidFill>
-                <a:latin typeface="ALS Sector Regular" pitchFamily="2" charset="0"/>
-                <a:ea typeface="Calibri" panose="020F0502020204030204" pitchFamily="34" charset="0"/>
-                <a:cs typeface="ALS Sector Regular" pitchFamily="2" charset="0"/>
-              </a:rPr>
-              <a:t>Numpy</a:t>
+              <a:t>uv</a:t>
             </a:r>
             <a:endParaRPr lang="en-US" sz="2000" dirty="0">
               <a:solidFill>
@@ -9334,7 +9324,7 @@
               </a:spcBef>
             </a:pPr>
             <a:r>
-              <a:rPr lang="en-US" sz="2000" dirty="0">
+              <a:rPr lang="en-US" sz="2000" dirty="0" err="1">
                 <a:solidFill>
                   <a:srgbClr val="434343"/>
                 </a:solidFill>
@@ -9342,7 +9332,18 @@
                 <a:ea typeface="Calibri" panose="020F0502020204030204" pitchFamily="34" charset="0"/>
                 <a:cs typeface="ALS Sector Regular" pitchFamily="2" charset="0"/>
               </a:rPr>
-              <a:t>Pandas</a:t>
+              <a:t>Jupyter</a:t>
+            </a:r>
+            <a:r>
+              <a:rPr lang="en-US" sz="2000" dirty="0">
+                <a:solidFill>
+                  <a:srgbClr val="434343"/>
+                </a:solidFill>
+                <a:latin typeface="ALS Sector Regular" pitchFamily="2" charset="0"/>
+                <a:ea typeface="Calibri" panose="020F0502020204030204" pitchFamily="34" charset="0"/>
+                <a:cs typeface="ALS Sector Regular" pitchFamily="2" charset="0"/>
+              </a:rPr>
+              <a:t> Notebook</a:t>
             </a:r>
           </a:p>
           <a:p>
@@ -9363,7 +9364,7 @@
                 <a:ea typeface="Calibri" panose="020F0502020204030204" pitchFamily="34" charset="0"/>
                 <a:cs typeface="ALS Sector Regular" pitchFamily="2" charset="0"/>
               </a:rPr>
-              <a:t>Scipy</a:t>
+              <a:t>Numpy</a:t>
             </a:r>
             <a:endParaRPr lang="en-US" sz="2000" dirty="0">
               <a:solidFill>
@@ -9392,7 +9393,7 @@
                 <a:ea typeface="Calibri" panose="020F0502020204030204" pitchFamily="34" charset="0"/>
                 <a:cs typeface="ALS Sector Regular" pitchFamily="2" charset="0"/>
               </a:rPr>
-              <a:t>Matplotlib</a:t>
+              <a:t>Pandas</a:t>
             </a:r>
           </a:p>
           <a:p>
@@ -9405,7 +9406,7 @@
               </a:spcBef>
             </a:pPr>
             <a:r>
-              <a:rPr lang="en-US" sz="2000" dirty="0">
+              <a:rPr lang="en-US" sz="2000" dirty="0" err="1">
                 <a:solidFill>
                   <a:srgbClr val="434343"/>
                 </a:solidFill>
@@ -9413,30 +9414,9 @@
                 <a:ea typeface="Calibri" panose="020F0502020204030204" pitchFamily="34" charset="0"/>
                 <a:cs typeface="ALS Sector Regular" pitchFamily="2" charset="0"/>
               </a:rPr>
-              <a:t>Sklearn</a:t>
-            </a:r>
-          </a:p>
-          <a:p>
-            <a:pPr>
-              <a:lnSpc>
-                <a:spcPct val="110000"/>
-              </a:lnSpc>
-              <a:spcBef>
-                <a:spcPts val="200"/>
-              </a:spcBef>
-            </a:pPr>
-            <a:r>
-              <a:rPr lang="en-US" sz="2000" dirty="0">
-                <a:solidFill>
-                  <a:srgbClr val="434343"/>
-                </a:solidFill>
-                <a:latin typeface="ALS Sector Regular" pitchFamily="2" charset="0"/>
-                <a:ea typeface="Calibri" panose="020F0502020204030204" pitchFamily="34" charset="0"/>
-                <a:cs typeface="ALS Sector Regular" pitchFamily="2" charset="0"/>
-              </a:rPr>
-              <a:t>Git</a:t>
-            </a:r>
-            <a:endParaRPr lang="ru-RU" sz="2000" dirty="0">
+              <a:t>Scipy</a:t>
+            </a:r>
+            <a:endParaRPr lang="en-US" sz="2000" dirty="0">
               <a:solidFill>
                 <a:srgbClr val="434343"/>
               </a:solidFill>
@@ -9455,7 +9435,7 @@
               </a:spcBef>
             </a:pPr>
             <a:r>
-              <a:rPr lang="en-US" sz="2000" dirty="0" err="1">
+              <a:rPr lang="en-US" sz="2000" dirty="0">
                 <a:solidFill>
                   <a:srgbClr val="434343"/>
                 </a:solidFill>
@@ -9463,9 +9443,30 @@
                 <a:ea typeface="Calibri" panose="020F0502020204030204" pitchFamily="34" charset="0"/>
                 <a:cs typeface="ALS Sector Regular" pitchFamily="2" charset="0"/>
               </a:rPr>
-              <a:t>uv</a:t>
-            </a:r>
-            <a:endParaRPr lang="ru-RU" sz="2000" dirty="0">
+              <a:t>Matplotlib</a:t>
+            </a:r>
+          </a:p>
+          <a:p>
+            <a:pPr>
+              <a:lnSpc>
+                <a:spcPct val="110000"/>
+              </a:lnSpc>
+              <a:spcBef>
+                <a:spcPts val="200"/>
+              </a:spcBef>
+            </a:pPr>
+            <a:r>
+              <a:rPr lang="en-US" sz="2000" dirty="0" err="1">
+                <a:solidFill>
+                  <a:srgbClr val="434343"/>
+                </a:solidFill>
+                <a:latin typeface="ALS Sector Regular" pitchFamily="2" charset="0"/>
+                <a:ea typeface="Calibri" panose="020F0502020204030204" pitchFamily="34" charset="0"/>
+                <a:cs typeface="ALS Sector Regular" pitchFamily="2" charset="0"/>
+              </a:rPr>
+              <a:t>Sklearn</a:t>
+            </a:r>
+            <a:endParaRPr lang="en-US" sz="2000" dirty="0">
               <a:solidFill>
                 <a:srgbClr val="434343"/>
               </a:solidFill>
@@ -11739,6 +11740,250 @@
                                         <p:tgtEl>
                                           <p:spTgt spid="3">
                                             <p:txEl>
+                                              <p:pRg st="2" end="2"/>
+                                            </p:txEl>
+                                          </p:spTgt>
+                                        </p:tgtEl>
+                                        <p:attrNameLst>
+                                          <p:attrName>style.visibility</p:attrName>
+                                        </p:attrNameLst>
+                                      </p:cBhvr>
+                                      <p:to>
+                                        <p:strVal val="visible"/>
+                                      </p:to>
+                                    </p:set>
+                                    <p:animEffect transition="in" filter="fade">
+                                      <p:cBhvr>
+                                        <p:cTn id="7" dur="500"/>
+                                        <p:tgtEl>
+                                          <p:spTgt spid="3">
+                                            <p:txEl>
+                                              <p:pRg st="2" end="2"/>
+                                            </p:txEl>
+                                          </p:spTgt>
+                                        </p:tgtEl>
+                                      </p:cBhvr>
+                                    </p:animEffect>
+                                  </p:childTnLst>
+                                </p:cTn>
+                              </p:par>
+                            </p:childTnLst>
+                          </p:cTn>
+                        </p:par>
+                      </p:childTnLst>
+                    </p:cTn>
+                  </p:par>
+                  <p:par>
+                    <p:cTn id="8" fill="hold">
+                      <p:stCondLst>
+                        <p:cond delay="indefinite"/>
+                      </p:stCondLst>
+                      <p:childTnLst>
+                        <p:par>
+                          <p:cTn id="9" fill="hold">
+                            <p:stCondLst>
+                              <p:cond delay="0"/>
+                            </p:stCondLst>
+                            <p:childTnLst>
+                              <p:par>
+                                <p:cTn id="10" presetID="10" presetClass="entr" presetSubtype="0" fill="hold" nodeType="clickEffect">
+                                  <p:stCondLst>
+                                    <p:cond delay="0"/>
+                                  </p:stCondLst>
+                                  <p:childTnLst>
+                                    <p:set>
+                                      <p:cBhvr>
+                                        <p:cTn id="11" dur="1" fill="hold">
+                                          <p:stCondLst>
+                                            <p:cond delay="0"/>
+                                          </p:stCondLst>
+                                        </p:cTn>
+                                        <p:tgtEl>
+                                          <p:spTgt spid="3">
+                                            <p:txEl>
+                                              <p:pRg st="3" end="3"/>
+                                            </p:txEl>
+                                          </p:spTgt>
+                                        </p:tgtEl>
+                                        <p:attrNameLst>
+                                          <p:attrName>style.visibility</p:attrName>
+                                        </p:attrNameLst>
+                                      </p:cBhvr>
+                                      <p:to>
+                                        <p:strVal val="visible"/>
+                                      </p:to>
+                                    </p:set>
+                                    <p:animEffect transition="in" filter="fade">
+                                      <p:cBhvr>
+                                        <p:cTn id="12" dur="500"/>
+                                        <p:tgtEl>
+                                          <p:spTgt spid="3">
+                                            <p:txEl>
+                                              <p:pRg st="3" end="3"/>
+                                            </p:txEl>
+                                          </p:spTgt>
+                                        </p:tgtEl>
+                                      </p:cBhvr>
+                                    </p:animEffect>
+                                  </p:childTnLst>
+                                </p:cTn>
+                              </p:par>
+                            </p:childTnLst>
+                          </p:cTn>
+                        </p:par>
+                      </p:childTnLst>
+                    </p:cTn>
+                  </p:par>
+                  <p:par>
+                    <p:cTn id="13" fill="hold">
+                      <p:stCondLst>
+                        <p:cond delay="indefinite"/>
+                      </p:stCondLst>
+                      <p:childTnLst>
+                        <p:par>
+                          <p:cTn id="14" fill="hold">
+                            <p:stCondLst>
+                              <p:cond delay="0"/>
+                            </p:stCondLst>
+                            <p:childTnLst>
+                              <p:par>
+                                <p:cTn id="15" presetID="10" presetClass="entr" presetSubtype="0" fill="hold" nodeType="clickEffect">
+                                  <p:stCondLst>
+                                    <p:cond delay="0"/>
+                                  </p:stCondLst>
+                                  <p:childTnLst>
+                                    <p:set>
+                                      <p:cBhvr>
+                                        <p:cTn id="16" dur="1" fill="hold">
+                                          <p:stCondLst>
+                                            <p:cond delay="0"/>
+                                          </p:stCondLst>
+                                        </p:cTn>
+                                        <p:tgtEl>
+                                          <p:spTgt spid="3">
+                                            <p:txEl>
+                                              <p:pRg st="5" end="5"/>
+                                            </p:txEl>
+                                          </p:spTgt>
+                                        </p:tgtEl>
+                                        <p:attrNameLst>
+                                          <p:attrName>style.visibility</p:attrName>
+                                        </p:attrNameLst>
+                                      </p:cBhvr>
+                                      <p:to>
+                                        <p:strVal val="visible"/>
+                                      </p:to>
+                                    </p:set>
+                                    <p:animEffect transition="in" filter="fade">
+                                      <p:cBhvr>
+                                        <p:cTn id="17" dur="500"/>
+                                        <p:tgtEl>
+                                          <p:spTgt spid="3">
+                                            <p:txEl>
+                                              <p:pRg st="5" end="5"/>
+                                            </p:txEl>
+                                          </p:spTgt>
+                                        </p:tgtEl>
+                                      </p:cBhvr>
+                                    </p:animEffect>
+                                  </p:childTnLst>
+                                </p:cTn>
+                              </p:par>
+                            </p:childTnLst>
+                          </p:cTn>
+                        </p:par>
+                      </p:childTnLst>
+                    </p:cTn>
+                  </p:par>
+                  <p:par>
+                    <p:cTn id="18" fill="hold">
+                      <p:stCondLst>
+                        <p:cond delay="indefinite"/>
+                      </p:stCondLst>
+                      <p:childTnLst>
+                        <p:par>
+                          <p:cTn id="19" fill="hold">
+                            <p:stCondLst>
+                              <p:cond delay="0"/>
+                            </p:stCondLst>
+                            <p:childTnLst>
+                              <p:par>
+                                <p:cTn id="20" presetID="10" presetClass="entr" presetSubtype="0" fill="hold" nodeType="clickEffect">
+                                  <p:stCondLst>
+                                    <p:cond delay="0"/>
+                                  </p:stCondLst>
+                                  <p:childTnLst>
+                                    <p:set>
+                                      <p:cBhvr>
+                                        <p:cTn id="21" dur="1" fill="hold">
+                                          <p:stCondLst>
+                                            <p:cond delay="0"/>
+                                          </p:stCondLst>
+                                        </p:cTn>
+                                        <p:tgtEl>
+                                          <p:spTgt spid="3">
+                                            <p:txEl>
+                                              <p:pRg st="7" end="7"/>
+                                            </p:txEl>
+                                          </p:spTgt>
+                                        </p:tgtEl>
+                                        <p:attrNameLst>
+                                          <p:attrName>style.visibility</p:attrName>
+                                        </p:attrNameLst>
+                                      </p:cBhvr>
+                                      <p:to>
+                                        <p:strVal val="visible"/>
+                                      </p:to>
+                                    </p:set>
+                                    <p:animEffect transition="in" filter="fade">
+                                      <p:cBhvr>
+                                        <p:cTn id="22" dur="500"/>
+                                        <p:tgtEl>
+                                          <p:spTgt spid="3">
+                                            <p:txEl>
+                                              <p:pRg st="7" end="7"/>
+                                            </p:txEl>
+                                          </p:spTgt>
+                                        </p:tgtEl>
+                                      </p:cBhvr>
+                                    </p:animEffect>
+                                  </p:childTnLst>
+                                </p:cTn>
+                              </p:par>
+                            </p:childTnLst>
+                          </p:cTn>
+                        </p:par>
+                      </p:childTnLst>
+                    </p:cTn>
+                  </p:par>
+                  <p:par>
+                    <p:cTn id="23" fill="hold">
+                      <p:stCondLst>
+                        <p:cond delay="indefinite"/>
+                      </p:stCondLst>
+                      <p:childTnLst>
+                        <p:par>
+                          <p:cTn id="24" fill="hold">
+                            <p:stCondLst>
+                              <p:cond delay="0"/>
+                            </p:stCondLst>
+                            <p:childTnLst>
+                              <p:par>
+                                <p:cTn id="25" presetID="10" presetClass="entr" presetSubtype="0" fill="hold" nodeType="clickEffect">
+                                  <p:stCondLst>
+                                    <p:cond delay="0"/>
+                                  </p:stCondLst>
+                                  <p:childTnLst>
+                                    <p:set>
+                                      <p:cBhvr>
+                                        <p:cTn id="26" dur="1" fill="hold">
+                                          <p:stCondLst>
+                                            <p:cond delay="0"/>
+                                          </p:stCondLst>
+                                        </p:cTn>
+                                        <p:tgtEl>
+                                          <p:spTgt spid="3">
+                                            <p:txEl>
                                               <p:pRg st="9" end="9"/>
                                             </p:txEl>
                                           </p:spTgt>
@@ -11753,7 +11998,7 @@
                                     </p:set>
                                     <p:animEffect transition="in" filter="fade">
                                       <p:cBhvr>
-                                        <p:cTn id="7" dur="500"/>
+                                        <p:cTn id="27" dur="500"/>
                                         <p:tgtEl>
                                           <p:spTgt spid="3">
                                             <p:txEl>
